--- a/2차시_PPT.pptx
+++ b/2차시_PPT.pptx
@@ -616,7 +616,7 @@
             </a:r>
             <a:r>
               <a:rPr lang="ko-KR" altLang="en-US"/>
-              <a:t>그림 출처</a:t>
+              <a:t>이미지 출처</a:t>
             </a:r>
             <a:r>
               <a:rPr lang="en-US" altLang="ko-KR"/>
@@ -626,6 +626,12 @@
               <a:rPr lang="ko-KR" altLang="en-US"/>
               <a:t> 미리캔버스</a:t>
             </a:r>
+            <a:endParaRPr lang="ko-KR" altLang="en-US"/>
+          </a:p>
+          <a:p>
+            <a:pPr lvl="0">
+              <a:defRPr/>
+            </a:pPr>
             <a:endParaRPr lang="ko-KR" altLang="en-US"/>
           </a:p>
         </p:txBody>
@@ -9029,7 +9035,7 @@
 </file>
 
 <file path=ppt/slides/slide12.xml><?xml version="1.0" encoding="utf-8"?>
-<p:sld xmlns:a="http://schemas.openxmlformats.org/drawingml/2006/main" xmlns:r="http://schemas.openxmlformats.org/officeDocument/2006/relationships" xmlns:p="http://schemas.openxmlformats.org/presentationml/2006/main">
+<p:sld xmlns:r="http://schemas.openxmlformats.org/officeDocument/2006/relationships" xmlns:c="http://schemas.openxmlformats.org/drawingml/2006/chart" xmlns:a="http://schemas.openxmlformats.org/drawingml/2006/main" xmlns:dgm="http://schemas.openxmlformats.org/drawingml/2006/diagram" xmlns:dsp="http://schemas.microsoft.com/office/drawing/2008/diagram" xmlns:p="http://schemas.openxmlformats.org/presentationml/2006/main">
   <p:cSld>
     <p:spTree>
       <p:nvGrpSpPr>
@@ -9527,6 +9533,69 @@
           </a:p>
         </p:txBody>
       </p:sp>
+      <p:sp>
+        <p:nvSpPr>
+          <p:cNvPr id="16" name="가로 글상자 15"/>
+          <p:cNvSpPr txBox="1"/>
+          <p:nvPr/>
+        </p:nvSpPr>
+        <p:spPr>
+          <a:xfrm>
+            <a:off x="9162218" y="6168936"/>
+            <a:ext cx="2902783" cy="220747"/>
+          </a:xfrm>
+          <a:prstGeom prst="rect">
+            <a:avLst/>
+          </a:prstGeom>
+        </p:spPr>
+        <p:txBody>
+          <a:bodyPr wrap="square">
+            <a:spAutoFit/>
+          </a:bodyPr>
+          <a:p>
+            <a:pPr lvl="0" algn="r">
+              <a:defRPr/>
+            </a:pPr>
+            <a:r>
+              <a:rPr lang="en-US" altLang="ko-KR" sz="900">
+                <a:solidFill>
+                  <a:srgbClr val="f2f2f2"/>
+                </a:solidFill>
+              </a:rPr>
+              <a:t>*</a:t>
+            </a:r>
+            <a:r>
+              <a:rPr lang="ko-KR" altLang="en-US" sz="900">
+                <a:solidFill>
+                  <a:srgbClr val="f2f2f2"/>
+                </a:solidFill>
+              </a:rPr>
+              <a:t>이미지 출처</a:t>
+            </a:r>
+            <a:r>
+              <a:rPr lang="en-US" altLang="ko-KR" sz="900">
+                <a:solidFill>
+                  <a:srgbClr val="f2f2f2"/>
+                </a:solidFill>
+              </a:rPr>
+              <a:t>:</a:t>
+            </a:r>
+            <a:r>
+              <a:rPr lang="ko-KR" altLang="en-US" sz="900">
+                <a:solidFill>
+                  <a:srgbClr val="f2f2f2"/>
+                </a:solidFill>
+              </a:rPr>
+              <a:t> 미리캔버스</a:t>
+            </a:r>
+            <a:endParaRPr lang="ko-KR" altLang="en-US" sz="900">
+              <a:solidFill>
+                <a:srgbClr val="f2f2f2"/>
+              </a:solidFill>
+            </a:endParaRPr>
+          </a:p>
+        </p:txBody>
+      </p:sp>
     </p:spTree>
     <p:extLst>
       <p:ext uri="{BB962C8B-B14F-4D97-AF65-F5344CB8AC3E}">
@@ -9541,7 +9610,7 @@
 </file>
 
 <file path=ppt/slides/slide13.xml><?xml version="1.0" encoding="utf-8"?>
-<p:sld xmlns:a="http://schemas.openxmlformats.org/drawingml/2006/main" xmlns:r="http://schemas.openxmlformats.org/officeDocument/2006/relationships" xmlns:p="http://schemas.openxmlformats.org/presentationml/2006/main">
+<p:sld xmlns:r="http://schemas.openxmlformats.org/officeDocument/2006/relationships" xmlns:c="http://schemas.openxmlformats.org/drawingml/2006/chart" xmlns:a="http://schemas.openxmlformats.org/drawingml/2006/main" xmlns:dgm="http://schemas.openxmlformats.org/drawingml/2006/diagram" xmlns:dsp="http://schemas.microsoft.com/office/drawing/2008/diagram" xmlns:p="http://schemas.openxmlformats.org/presentationml/2006/main">
   <p:cSld>
     <p:spTree>
       <p:nvGrpSpPr>
@@ -9895,7 +9964,7 @@
           <p:nvPr/>
         </p:nvPicPr>
         <p:blipFill rotWithShape="1">
-          <a:blip r:embed="rId3"/>
+          <a:blip r:embed="rId4"/>
           <a:srcRect b="50152"/>
           <a:stretch/>
         </p:blipFill>
@@ -9962,6 +10031,69 @@
             <a:endParaRPr lang="ko-KR" altLang="en-US">
               <a:solidFill>
                 <a:schemeClr val="tx1"/>
+              </a:solidFill>
+            </a:endParaRPr>
+          </a:p>
+        </p:txBody>
+      </p:sp>
+      <p:sp>
+        <p:nvSpPr>
+          <p:cNvPr id="12" name="가로 글상자 11"/>
+          <p:cNvSpPr txBox="1"/>
+          <p:nvPr/>
+        </p:nvSpPr>
+        <p:spPr>
+          <a:xfrm>
+            <a:off x="9162218" y="6168936"/>
+            <a:ext cx="2902783" cy="220747"/>
+          </a:xfrm>
+          <a:prstGeom prst="rect">
+            <a:avLst/>
+          </a:prstGeom>
+        </p:spPr>
+        <p:txBody>
+          <a:bodyPr wrap="square">
+            <a:spAutoFit/>
+          </a:bodyPr>
+          <a:p>
+            <a:pPr lvl="0" algn="r">
+              <a:defRPr/>
+            </a:pPr>
+            <a:r>
+              <a:rPr lang="en-US" altLang="ko-KR" sz="900">
+                <a:solidFill>
+                  <a:srgbClr val="f2f2f2"/>
+                </a:solidFill>
+              </a:rPr>
+              <a:t>*</a:t>
+            </a:r>
+            <a:r>
+              <a:rPr lang="ko-KR" altLang="en-US" sz="900">
+                <a:solidFill>
+                  <a:srgbClr val="f2f2f2"/>
+                </a:solidFill>
+              </a:rPr>
+              <a:t>이미지 출처</a:t>
+            </a:r>
+            <a:r>
+              <a:rPr lang="en-US" altLang="ko-KR" sz="900">
+                <a:solidFill>
+                  <a:srgbClr val="f2f2f2"/>
+                </a:solidFill>
+              </a:rPr>
+              <a:t>:</a:t>
+            </a:r>
+            <a:r>
+              <a:rPr lang="ko-KR" altLang="en-US" sz="900">
+                <a:solidFill>
+                  <a:srgbClr val="f2f2f2"/>
+                </a:solidFill>
+              </a:rPr>
+              <a:t> 미리캔버스</a:t>
+            </a:r>
+            <a:endParaRPr lang="ko-KR" altLang="en-US" sz="900">
+              <a:solidFill>
+                <a:srgbClr val="f2f2f2"/>
               </a:solidFill>
             </a:endParaRPr>
           </a:p>
@@ -10059,7 +10191,7 @@
 </file>
 
 <file path=ppt/slides/slide14.xml><?xml version="1.0" encoding="utf-8"?>
-<p:sld xmlns:a="http://schemas.openxmlformats.org/drawingml/2006/main" xmlns:r="http://schemas.openxmlformats.org/officeDocument/2006/relationships" xmlns:p="http://schemas.openxmlformats.org/presentationml/2006/main">
+<p:sld xmlns:r="http://schemas.openxmlformats.org/officeDocument/2006/relationships" xmlns:c="http://schemas.openxmlformats.org/drawingml/2006/chart" xmlns:a="http://schemas.openxmlformats.org/drawingml/2006/main" xmlns:dgm="http://schemas.openxmlformats.org/drawingml/2006/diagram" xmlns:dsp="http://schemas.microsoft.com/office/drawing/2008/diagram" xmlns:p="http://schemas.openxmlformats.org/presentationml/2006/main">
   <p:cSld>
     <p:spTree>
       <p:nvGrpSpPr>
@@ -10608,7 +10740,7 @@
           <p:nvPr/>
         </p:nvPicPr>
         <p:blipFill rotWithShape="1">
-          <a:blip r:embed="rId3"/>
+          <a:blip r:embed="rId4"/>
           <a:srcRect b="50359"/>
           <a:stretch/>
         </p:blipFill>
@@ -10622,6 +10754,69 @@
           </a:prstGeom>
         </p:spPr>
       </p:pic>
+      <p:sp>
+        <p:nvSpPr>
+          <p:cNvPr id="16" name="가로 글상자 15"/>
+          <p:cNvSpPr txBox="1"/>
+          <p:nvPr/>
+        </p:nvSpPr>
+        <p:spPr>
+          <a:xfrm>
+            <a:off x="9162218" y="6168936"/>
+            <a:ext cx="2902783" cy="220747"/>
+          </a:xfrm>
+          <a:prstGeom prst="rect">
+            <a:avLst/>
+          </a:prstGeom>
+        </p:spPr>
+        <p:txBody>
+          <a:bodyPr wrap="square">
+            <a:spAutoFit/>
+          </a:bodyPr>
+          <a:p>
+            <a:pPr lvl="0" algn="r">
+              <a:defRPr/>
+            </a:pPr>
+            <a:r>
+              <a:rPr lang="en-US" altLang="ko-KR" sz="900">
+                <a:solidFill>
+                  <a:srgbClr val="f2f2f2"/>
+                </a:solidFill>
+              </a:rPr>
+              <a:t>*</a:t>
+            </a:r>
+            <a:r>
+              <a:rPr lang="ko-KR" altLang="en-US" sz="900">
+                <a:solidFill>
+                  <a:srgbClr val="f2f2f2"/>
+                </a:solidFill>
+              </a:rPr>
+              <a:t>이미지 출처</a:t>
+            </a:r>
+            <a:r>
+              <a:rPr lang="en-US" altLang="ko-KR" sz="900">
+                <a:solidFill>
+                  <a:srgbClr val="f2f2f2"/>
+                </a:solidFill>
+              </a:rPr>
+              <a:t>:</a:t>
+            </a:r>
+            <a:r>
+              <a:rPr lang="ko-KR" altLang="en-US" sz="900">
+                <a:solidFill>
+                  <a:srgbClr val="f2f2f2"/>
+                </a:solidFill>
+              </a:rPr>
+              <a:t> 미리캔버스</a:t>
+            </a:r>
+            <a:endParaRPr lang="ko-KR" altLang="en-US" sz="900">
+              <a:solidFill>
+                <a:srgbClr val="f2f2f2"/>
+              </a:solidFill>
+            </a:endParaRPr>
+          </a:p>
+        </p:txBody>
+      </p:sp>
     </p:spTree>
     <p:extLst>
       <p:ext uri="{BB962C8B-B14F-4D97-AF65-F5344CB8AC3E}">
@@ -10636,7 +10831,7 @@
 </file>
 
 <file path=ppt/slides/slide15.xml><?xml version="1.0" encoding="utf-8"?>
-<p:sld xmlns:a="http://schemas.openxmlformats.org/drawingml/2006/main" xmlns:r="http://schemas.openxmlformats.org/officeDocument/2006/relationships" xmlns:p="http://schemas.openxmlformats.org/presentationml/2006/main">
+<p:sld xmlns:r="http://schemas.openxmlformats.org/officeDocument/2006/relationships" xmlns:c="http://schemas.openxmlformats.org/drawingml/2006/chart" xmlns:a="http://schemas.openxmlformats.org/drawingml/2006/main" xmlns:dgm="http://schemas.openxmlformats.org/drawingml/2006/diagram" xmlns:dsp="http://schemas.microsoft.com/office/drawing/2008/diagram" xmlns:p="http://schemas.openxmlformats.org/presentationml/2006/main">
   <p:cSld>
     <p:spTree>
       <p:nvGrpSpPr>
@@ -10990,7 +11185,7 @@
           <p:nvPr/>
         </p:nvPicPr>
         <p:blipFill rotWithShape="1">
-          <a:blip r:embed="rId3"/>
+          <a:blip r:embed="rId4"/>
           <a:srcRect b="50359"/>
           <a:stretch/>
         </p:blipFill>
@@ -11057,6 +11252,69 @@
             <a:endParaRPr lang="ko-KR" altLang="en-US">
               <a:solidFill>
                 <a:schemeClr val="tx1"/>
+              </a:solidFill>
+            </a:endParaRPr>
+          </a:p>
+        </p:txBody>
+      </p:sp>
+      <p:sp>
+        <p:nvSpPr>
+          <p:cNvPr id="14" name="가로 글상자 13"/>
+          <p:cNvSpPr txBox="1"/>
+          <p:nvPr/>
+        </p:nvSpPr>
+        <p:spPr>
+          <a:xfrm>
+            <a:off x="9162218" y="6168936"/>
+            <a:ext cx="2902783" cy="220747"/>
+          </a:xfrm>
+          <a:prstGeom prst="rect">
+            <a:avLst/>
+          </a:prstGeom>
+        </p:spPr>
+        <p:txBody>
+          <a:bodyPr wrap="square">
+            <a:spAutoFit/>
+          </a:bodyPr>
+          <a:p>
+            <a:pPr lvl="0" algn="r">
+              <a:defRPr/>
+            </a:pPr>
+            <a:r>
+              <a:rPr lang="en-US" altLang="ko-KR" sz="900">
+                <a:solidFill>
+                  <a:srgbClr val="f2f2f2"/>
+                </a:solidFill>
+              </a:rPr>
+              <a:t>*</a:t>
+            </a:r>
+            <a:r>
+              <a:rPr lang="ko-KR" altLang="en-US" sz="900">
+                <a:solidFill>
+                  <a:srgbClr val="f2f2f2"/>
+                </a:solidFill>
+              </a:rPr>
+              <a:t>이미지 출처</a:t>
+            </a:r>
+            <a:r>
+              <a:rPr lang="en-US" altLang="ko-KR" sz="900">
+                <a:solidFill>
+                  <a:srgbClr val="f2f2f2"/>
+                </a:solidFill>
+              </a:rPr>
+              <a:t>:</a:t>
+            </a:r>
+            <a:r>
+              <a:rPr lang="ko-KR" altLang="en-US" sz="900">
+                <a:solidFill>
+                  <a:srgbClr val="f2f2f2"/>
+                </a:solidFill>
+              </a:rPr>
+              <a:t> 미리캔버스</a:t>
+            </a:r>
+            <a:endParaRPr lang="ko-KR" altLang="en-US" sz="900">
+              <a:solidFill>
+                <a:srgbClr val="f2f2f2"/>
               </a:solidFill>
             </a:endParaRPr>
           </a:p>
@@ -11154,7 +11412,7 @@
 </file>
 
 <file path=ppt/slides/slide16.xml><?xml version="1.0" encoding="utf-8"?>
-<p:sld xmlns:a="http://schemas.openxmlformats.org/drawingml/2006/main" xmlns:r="http://schemas.openxmlformats.org/officeDocument/2006/relationships" xmlns:p="http://schemas.openxmlformats.org/presentationml/2006/main">
+<p:sld xmlns:r="http://schemas.openxmlformats.org/officeDocument/2006/relationships" xmlns:c="http://schemas.openxmlformats.org/drawingml/2006/chart" xmlns:a="http://schemas.openxmlformats.org/drawingml/2006/main" xmlns:dgm="http://schemas.openxmlformats.org/drawingml/2006/diagram" xmlns:dsp="http://schemas.microsoft.com/office/drawing/2008/diagram" xmlns:p="http://schemas.openxmlformats.org/presentationml/2006/main">
   <p:cSld>
     <p:spTree>
       <p:nvGrpSpPr>
@@ -11662,6 +11920,69 @@
           </a:prstGeom>
         </p:spPr>
       </p:pic>
+      <p:sp>
+        <p:nvSpPr>
+          <p:cNvPr id="16" name="가로 글상자 15"/>
+          <p:cNvSpPr txBox="1"/>
+          <p:nvPr/>
+        </p:nvSpPr>
+        <p:spPr>
+          <a:xfrm>
+            <a:off x="9162218" y="6168936"/>
+            <a:ext cx="2902783" cy="220747"/>
+          </a:xfrm>
+          <a:prstGeom prst="rect">
+            <a:avLst/>
+          </a:prstGeom>
+        </p:spPr>
+        <p:txBody>
+          <a:bodyPr wrap="square">
+            <a:spAutoFit/>
+          </a:bodyPr>
+          <a:p>
+            <a:pPr lvl="0" algn="r">
+              <a:defRPr/>
+            </a:pPr>
+            <a:r>
+              <a:rPr lang="en-US" altLang="ko-KR" sz="900">
+                <a:solidFill>
+                  <a:srgbClr val="f2f2f2"/>
+                </a:solidFill>
+              </a:rPr>
+              <a:t>*</a:t>
+            </a:r>
+            <a:r>
+              <a:rPr lang="ko-KR" altLang="en-US" sz="900">
+                <a:solidFill>
+                  <a:srgbClr val="f2f2f2"/>
+                </a:solidFill>
+              </a:rPr>
+              <a:t>이미지 출처</a:t>
+            </a:r>
+            <a:r>
+              <a:rPr lang="en-US" altLang="ko-KR" sz="900">
+                <a:solidFill>
+                  <a:srgbClr val="f2f2f2"/>
+                </a:solidFill>
+              </a:rPr>
+              <a:t>:</a:t>
+            </a:r>
+            <a:r>
+              <a:rPr lang="ko-KR" altLang="en-US" sz="900">
+                <a:solidFill>
+                  <a:srgbClr val="f2f2f2"/>
+                </a:solidFill>
+              </a:rPr>
+              <a:t> 미리캔버스</a:t>
+            </a:r>
+            <a:endParaRPr lang="ko-KR" altLang="en-US" sz="900">
+              <a:solidFill>
+                <a:srgbClr val="f2f2f2"/>
+              </a:solidFill>
+            </a:endParaRPr>
+          </a:p>
+        </p:txBody>
+      </p:sp>
     </p:spTree>
     <p:extLst>
       <p:ext uri="{BB962C8B-B14F-4D97-AF65-F5344CB8AC3E}">
@@ -11676,7 +11997,7 @@
 </file>
 
 <file path=ppt/slides/slide17.xml><?xml version="1.0" encoding="utf-8"?>
-<p:sld xmlns:a="http://schemas.openxmlformats.org/drawingml/2006/main" xmlns:r="http://schemas.openxmlformats.org/officeDocument/2006/relationships" xmlns:p="http://schemas.openxmlformats.org/presentationml/2006/main">
+<p:sld xmlns:r="http://schemas.openxmlformats.org/officeDocument/2006/relationships" xmlns:c="http://schemas.openxmlformats.org/drawingml/2006/chart" xmlns:a="http://schemas.openxmlformats.org/drawingml/2006/main" xmlns:dgm="http://schemas.openxmlformats.org/drawingml/2006/diagram" xmlns:dsp="http://schemas.microsoft.com/office/drawing/2008/diagram" xmlns:p="http://schemas.openxmlformats.org/presentationml/2006/main">
   <p:cSld>
     <p:spTree>
       <p:nvGrpSpPr>
@@ -12030,7 +12351,7 @@
           <p:nvPr/>
         </p:nvPicPr>
         <p:blipFill rotWithShape="1">
-          <a:blip r:embed="rId3"/>
+          <a:blip r:embed="rId4"/>
           <a:srcRect t="50433"/>
           <a:stretch/>
         </p:blipFill>
@@ -12097,6 +12418,69 @@
             <a:endParaRPr lang="ko-KR" altLang="en-US">
               <a:solidFill>
                 <a:schemeClr val="tx1"/>
+              </a:solidFill>
+            </a:endParaRPr>
+          </a:p>
+        </p:txBody>
+      </p:sp>
+      <p:sp>
+        <p:nvSpPr>
+          <p:cNvPr id="15" name="가로 글상자 14"/>
+          <p:cNvSpPr txBox="1"/>
+          <p:nvPr/>
+        </p:nvSpPr>
+        <p:spPr>
+          <a:xfrm>
+            <a:off x="9162218" y="6168936"/>
+            <a:ext cx="2902783" cy="220747"/>
+          </a:xfrm>
+          <a:prstGeom prst="rect">
+            <a:avLst/>
+          </a:prstGeom>
+        </p:spPr>
+        <p:txBody>
+          <a:bodyPr wrap="square">
+            <a:spAutoFit/>
+          </a:bodyPr>
+          <a:p>
+            <a:pPr lvl="0" algn="r">
+              <a:defRPr/>
+            </a:pPr>
+            <a:r>
+              <a:rPr lang="en-US" altLang="ko-KR" sz="900">
+                <a:solidFill>
+                  <a:srgbClr val="f2f2f2"/>
+                </a:solidFill>
+              </a:rPr>
+              <a:t>*</a:t>
+            </a:r>
+            <a:r>
+              <a:rPr lang="ko-KR" altLang="en-US" sz="900">
+                <a:solidFill>
+                  <a:srgbClr val="f2f2f2"/>
+                </a:solidFill>
+              </a:rPr>
+              <a:t>이미지 출처</a:t>
+            </a:r>
+            <a:r>
+              <a:rPr lang="en-US" altLang="ko-KR" sz="900">
+                <a:solidFill>
+                  <a:srgbClr val="f2f2f2"/>
+                </a:solidFill>
+              </a:rPr>
+              <a:t>:</a:t>
+            </a:r>
+            <a:r>
+              <a:rPr lang="ko-KR" altLang="en-US" sz="900">
+                <a:solidFill>
+                  <a:srgbClr val="f2f2f2"/>
+                </a:solidFill>
+              </a:rPr>
+              <a:t> 미리캔버스</a:t>
+            </a:r>
+            <a:endParaRPr lang="ko-KR" altLang="en-US" sz="900">
+              <a:solidFill>
+                <a:srgbClr val="f2f2f2"/>
               </a:solidFill>
             </a:endParaRPr>
           </a:p>
@@ -12194,7 +12578,7 @@
 </file>
 
 <file path=ppt/slides/slide18.xml><?xml version="1.0" encoding="utf-8"?>
-<p:sld xmlns:a="http://schemas.openxmlformats.org/drawingml/2006/main" xmlns:r="http://schemas.openxmlformats.org/officeDocument/2006/relationships" xmlns:p="http://schemas.openxmlformats.org/presentationml/2006/main">
+<p:sld xmlns:r="http://schemas.openxmlformats.org/officeDocument/2006/relationships" xmlns:c="http://schemas.openxmlformats.org/drawingml/2006/chart" xmlns:a="http://schemas.openxmlformats.org/drawingml/2006/main" xmlns:dgm="http://schemas.openxmlformats.org/drawingml/2006/diagram" xmlns:dsp="http://schemas.microsoft.com/office/drawing/2008/diagram" xmlns:p="http://schemas.openxmlformats.org/presentationml/2006/main">
   <p:cSld>
     <p:spTree>
       <p:nvGrpSpPr>
@@ -12547,6 +12931,69 @@
           </a:prstGeom>
         </p:spPr>
       </p:pic>
+      <p:sp>
+        <p:nvSpPr>
+          <p:cNvPr id="11" name="가로 글상자 10"/>
+          <p:cNvSpPr txBox="1"/>
+          <p:nvPr/>
+        </p:nvSpPr>
+        <p:spPr>
+          <a:xfrm>
+            <a:off x="9162218" y="6168936"/>
+            <a:ext cx="2902783" cy="220747"/>
+          </a:xfrm>
+          <a:prstGeom prst="rect">
+            <a:avLst/>
+          </a:prstGeom>
+        </p:spPr>
+        <p:txBody>
+          <a:bodyPr wrap="square">
+            <a:spAutoFit/>
+          </a:bodyPr>
+          <a:p>
+            <a:pPr lvl="0" algn="r">
+              <a:defRPr/>
+            </a:pPr>
+            <a:r>
+              <a:rPr lang="en-US" altLang="ko-KR" sz="900">
+                <a:solidFill>
+                  <a:srgbClr val="f2f2f2"/>
+                </a:solidFill>
+              </a:rPr>
+              <a:t>*</a:t>
+            </a:r>
+            <a:r>
+              <a:rPr lang="ko-KR" altLang="en-US" sz="900">
+                <a:solidFill>
+                  <a:srgbClr val="f2f2f2"/>
+                </a:solidFill>
+              </a:rPr>
+              <a:t>이미지 출처</a:t>
+            </a:r>
+            <a:r>
+              <a:rPr lang="en-US" altLang="ko-KR" sz="900">
+                <a:solidFill>
+                  <a:srgbClr val="f2f2f2"/>
+                </a:solidFill>
+              </a:rPr>
+              <a:t>:</a:t>
+            </a:r>
+            <a:r>
+              <a:rPr lang="ko-KR" altLang="en-US" sz="900">
+                <a:solidFill>
+                  <a:srgbClr val="f2f2f2"/>
+                </a:solidFill>
+              </a:rPr>
+              <a:t> 미리캔버스</a:t>
+            </a:r>
+            <a:endParaRPr lang="ko-KR" altLang="en-US" sz="900">
+              <a:solidFill>
+                <a:srgbClr val="f2f2f2"/>
+              </a:solidFill>
+            </a:endParaRPr>
+          </a:p>
+        </p:txBody>
+      </p:sp>
     </p:spTree>
     <p:extLst>
       <p:ext uri="{BB962C8B-B14F-4D97-AF65-F5344CB8AC3E}">
@@ -12561,7 +13008,7 @@
 </file>
 
 <file path=ppt/slides/slide19.xml><?xml version="1.0" encoding="utf-8"?>
-<p:sld xmlns:a="http://schemas.openxmlformats.org/drawingml/2006/main" xmlns:r="http://schemas.openxmlformats.org/officeDocument/2006/relationships" xmlns:p="http://schemas.openxmlformats.org/presentationml/2006/main">
+<p:sld xmlns:r="http://schemas.openxmlformats.org/officeDocument/2006/relationships" xmlns:c="http://schemas.openxmlformats.org/drawingml/2006/chart" xmlns:a="http://schemas.openxmlformats.org/drawingml/2006/main" xmlns:dgm="http://schemas.openxmlformats.org/drawingml/2006/diagram" xmlns:dsp="http://schemas.microsoft.com/office/drawing/2008/diagram" xmlns:p="http://schemas.openxmlformats.org/presentationml/2006/main">
   <p:cSld>
     <p:spTree>
       <p:nvGrpSpPr>
@@ -12947,6 +13394,69 @@
           </a:prstGeom>
         </p:spPr>
       </p:pic>
+      <p:sp>
+        <p:nvSpPr>
+          <p:cNvPr id="12" name="가로 글상자 11"/>
+          <p:cNvSpPr txBox="1"/>
+          <p:nvPr/>
+        </p:nvSpPr>
+        <p:spPr>
+          <a:xfrm>
+            <a:off x="9162218" y="6168936"/>
+            <a:ext cx="2902783" cy="220747"/>
+          </a:xfrm>
+          <a:prstGeom prst="rect">
+            <a:avLst/>
+          </a:prstGeom>
+        </p:spPr>
+        <p:txBody>
+          <a:bodyPr wrap="square">
+            <a:spAutoFit/>
+          </a:bodyPr>
+          <a:p>
+            <a:pPr lvl="0" algn="r">
+              <a:defRPr/>
+            </a:pPr>
+            <a:r>
+              <a:rPr lang="en-US" altLang="ko-KR" sz="900">
+                <a:solidFill>
+                  <a:srgbClr val="f2f2f2"/>
+                </a:solidFill>
+              </a:rPr>
+              <a:t>*</a:t>
+            </a:r>
+            <a:r>
+              <a:rPr lang="ko-KR" altLang="en-US" sz="900">
+                <a:solidFill>
+                  <a:srgbClr val="f2f2f2"/>
+                </a:solidFill>
+              </a:rPr>
+              <a:t>이미지 출처</a:t>
+            </a:r>
+            <a:r>
+              <a:rPr lang="en-US" altLang="ko-KR" sz="900">
+                <a:solidFill>
+                  <a:srgbClr val="f2f2f2"/>
+                </a:solidFill>
+              </a:rPr>
+              <a:t>:</a:t>
+            </a:r>
+            <a:r>
+              <a:rPr lang="ko-KR" altLang="en-US" sz="900">
+                <a:solidFill>
+                  <a:srgbClr val="f2f2f2"/>
+                </a:solidFill>
+              </a:rPr>
+              <a:t> 미리캔버스</a:t>
+            </a:r>
+            <a:endParaRPr lang="ko-KR" altLang="en-US" sz="900">
+              <a:solidFill>
+                <a:srgbClr val="f2f2f2"/>
+              </a:solidFill>
+            </a:endParaRPr>
+          </a:p>
+        </p:txBody>
+      </p:sp>
     </p:spTree>
     <p:extLst>
       <p:ext uri="{BB962C8B-B14F-4D97-AF65-F5344CB8AC3E}">
@@ -13091,6 +13601,53 @@
           </a:prstGeom>
         </p:spPr>
       </p:pic>
+      <p:sp>
+        <p:nvSpPr>
+          <p:cNvPr id="16" name="가로 글상자 15"/>
+          <p:cNvSpPr txBox="1"/>
+          <p:nvPr/>
+        </p:nvSpPr>
+        <p:spPr>
+          <a:xfrm>
+            <a:off x="9162218" y="5702211"/>
+            <a:ext cx="2902783" cy="220747"/>
+          </a:xfrm>
+          <a:prstGeom prst="rect">
+            <a:avLst/>
+          </a:prstGeom>
+        </p:spPr>
+        <p:txBody>
+          <a:bodyPr wrap="square">
+            <a:spAutoFit/>
+          </a:bodyPr>
+          <a:p>
+            <a:pPr lvl="0" algn="r">
+              <a:defRPr/>
+            </a:pPr>
+            <a:r>
+              <a:rPr lang="en-US" altLang="ko-KR" sz="900">
+                <a:solidFill>
+                  <a:srgbClr val="ffef99"/>
+                </a:solidFill>
+              </a:rPr>
+              <a:t>AI</a:t>
+            </a:r>
+            <a:r>
+              <a:rPr lang="ko-KR" altLang="en-US" sz="900">
+                <a:solidFill>
+                  <a:srgbClr val="ffef99"/>
+                </a:solidFill>
+              </a:rPr>
+              <a:t> 활용 이미지</a:t>
+            </a:r>
+            <a:endParaRPr lang="ko-KR" altLang="en-US" sz="900">
+              <a:solidFill>
+                <a:srgbClr val="ffef99"/>
+              </a:solidFill>
+            </a:endParaRPr>
+          </a:p>
+        </p:txBody>
+      </p:sp>
     </p:spTree>
     <p:extLst>
       <p:ext uri="{BB962C8B-B14F-4D97-AF65-F5344CB8AC3E}">
@@ -13105,7 +13662,7 @@
 </file>
 
 <file path=ppt/slides/slide20.xml><?xml version="1.0" encoding="utf-8"?>
-<p:sld xmlns:a="http://schemas.openxmlformats.org/drawingml/2006/main" xmlns:r="http://schemas.openxmlformats.org/officeDocument/2006/relationships" xmlns:p="http://schemas.openxmlformats.org/presentationml/2006/main">
+<p:sld xmlns:r="http://schemas.openxmlformats.org/officeDocument/2006/relationships" xmlns:c="http://schemas.openxmlformats.org/drawingml/2006/chart" xmlns:a="http://schemas.openxmlformats.org/drawingml/2006/main" xmlns:dgm="http://schemas.openxmlformats.org/drawingml/2006/diagram" xmlns:dsp="http://schemas.microsoft.com/office/drawing/2008/diagram" xmlns:p="http://schemas.openxmlformats.org/presentationml/2006/main">
   <p:cSld>
     <p:spTree>
       <p:nvGrpSpPr>
@@ -13504,6 +14061,69 @@
           </a:p>
         </p:txBody>
       </p:sp>
+      <p:sp>
+        <p:nvSpPr>
+          <p:cNvPr id="12" name="가로 글상자 11"/>
+          <p:cNvSpPr txBox="1"/>
+          <p:nvPr/>
+        </p:nvSpPr>
+        <p:spPr>
+          <a:xfrm>
+            <a:off x="9162218" y="6168936"/>
+            <a:ext cx="2902783" cy="220747"/>
+          </a:xfrm>
+          <a:prstGeom prst="rect">
+            <a:avLst/>
+          </a:prstGeom>
+        </p:spPr>
+        <p:txBody>
+          <a:bodyPr wrap="square">
+            <a:spAutoFit/>
+          </a:bodyPr>
+          <a:p>
+            <a:pPr lvl="0" algn="r">
+              <a:defRPr/>
+            </a:pPr>
+            <a:r>
+              <a:rPr lang="en-US" altLang="ko-KR" sz="900">
+                <a:solidFill>
+                  <a:srgbClr val="f2f2f2"/>
+                </a:solidFill>
+              </a:rPr>
+              <a:t>*</a:t>
+            </a:r>
+            <a:r>
+              <a:rPr lang="ko-KR" altLang="en-US" sz="900">
+                <a:solidFill>
+                  <a:srgbClr val="f2f2f2"/>
+                </a:solidFill>
+              </a:rPr>
+              <a:t>이미지 출처</a:t>
+            </a:r>
+            <a:r>
+              <a:rPr lang="en-US" altLang="ko-KR" sz="900">
+                <a:solidFill>
+                  <a:srgbClr val="f2f2f2"/>
+                </a:solidFill>
+              </a:rPr>
+              <a:t>:</a:t>
+            </a:r>
+            <a:r>
+              <a:rPr lang="ko-KR" altLang="en-US" sz="900">
+                <a:solidFill>
+                  <a:srgbClr val="f2f2f2"/>
+                </a:solidFill>
+              </a:rPr>
+              <a:t> 미리캔버스</a:t>
+            </a:r>
+            <a:endParaRPr lang="ko-KR" altLang="en-US" sz="900">
+              <a:solidFill>
+                <a:srgbClr val="f2f2f2"/>
+              </a:solidFill>
+            </a:endParaRPr>
+          </a:p>
+        </p:txBody>
+      </p:sp>
     </p:spTree>
     <p:extLst>
       <p:ext uri="{BB962C8B-B14F-4D97-AF65-F5344CB8AC3E}">
@@ -13518,7 +14138,7 @@
 </file>
 
 <file path=ppt/slides/slide21.xml><?xml version="1.0" encoding="utf-8"?>
-<p:sld xmlns:a="http://schemas.openxmlformats.org/drawingml/2006/main" xmlns:r="http://schemas.openxmlformats.org/officeDocument/2006/relationships" xmlns:p="http://schemas.openxmlformats.org/presentationml/2006/main">
+<p:sld xmlns:r="http://schemas.openxmlformats.org/officeDocument/2006/relationships" xmlns:c="http://schemas.openxmlformats.org/drawingml/2006/chart" xmlns:a="http://schemas.openxmlformats.org/drawingml/2006/main" xmlns:dgm="http://schemas.openxmlformats.org/drawingml/2006/diagram" xmlns:dsp="http://schemas.microsoft.com/office/drawing/2008/diagram" xmlns:p="http://schemas.openxmlformats.org/presentationml/2006/main">
   <p:cSld>
     <p:spTree>
       <p:nvGrpSpPr>
@@ -13917,6 +14537,69 @@
           </a:prstGeom>
         </p:spPr>
       </p:pic>
+      <p:sp>
+        <p:nvSpPr>
+          <p:cNvPr id="12" name="가로 글상자 11"/>
+          <p:cNvSpPr txBox="1"/>
+          <p:nvPr/>
+        </p:nvSpPr>
+        <p:spPr>
+          <a:xfrm>
+            <a:off x="9162218" y="6168936"/>
+            <a:ext cx="2902783" cy="220747"/>
+          </a:xfrm>
+          <a:prstGeom prst="rect">
+            <a:avLst/>
+          </a:prstGeom>
+        </p:spPr>
+        <p:txBody>
+          <a:bodyPr wrap="square">
+            <a:spAutoFit/>
+          </a:bodyPr>
+          <a:p>
+            <a:pPr lvl="0" algn="r">
+              <a:defRPr/>
+            </a:pPr>
+            <a:r>
+              <a:rPr lang="en-US" altLang="ko-KR" sz="900">
+                <a:solidFill>
+                  <a:srgbClr val="f2f2f2"/>
+                </a:solidFill>
+              </a:rPr>
+              <a:t>*</a:t>
+            </a:r>
+            <a:r>
+              <a:rPr lang="ko-KR" altLang="en-US" sz="900">
+                <a:solidFill>
+                  <a:srgbClr val="f2f2f2"/>
+                </a:solidFill>
+              </a:rPr>
+              <a:t>이미지 출처</a:t>
+            </a:r>
+            <a:r>
+              <a:rPr lang="en-US" altLang="ko-KR" sz="900">
+                <a:solidFill>
+                  <a:srgbClr val="f2f2f2"/>
+                </a:solidFill>
+              </a:rPr>
+              <a:t>:</a:t>
+            </a:r>
+            <a:r>
+              <a:rPr lang="ko-KR" altLang="en-US" sz="900">
+                <a:solidFill>
+                  <a:srgbClr val="f2f2f2"/>
+                </a:solidFill>
+              </a:rPr>
+              <a:t> 미리캔버스</a:t>
+            </a:r>
+            <a:endParaRPr lang="ko-KR" altLang="en-US" sz="900">
+              <a:solidFill>
+                <a:srgbClr val="f2f2f2"/>
+              </a:solidFill>
+            </a:endParaRPr>
+          </a:p>
+        </p:txBody>
+      </p:sp>
     </p:spTree>
     <p:extLst>
       <p:ext uri="{BB962C8B-B14F-4D97-AF65-F5344CB8AC3E}">
@@ -14828,7 +15511,7 @@
 </file>
 
 <file path=ppt/slides/slide4.xml><?xml version="1.0" encoding="utf-8"?>
-<p:sld xmlns:a="http://schemas.openxmlformats.org/drawingml/2006/main" xmlns:r="http://schemas.openxmlformats.org/officeDocument/2006/relationships" xmlns:p="http://schemas.openxmlformats.org/presentationml/2006/main">
+<p:sld xmlns:r="http://schemas.openxmlformats.org/officeDocument/2006/relationships" xmlns:c="http://schemas.openxmlformats.org/drawingml/2006/chart" xmlns:a="http://schemas.openxmlformats.org/drawingml/2006/main" xmlns:dgm="http://schemas.openxmlformats.org/drawingml/2006/diagram" xmlns:dsp="http://schemas.microsoft.com/office/drawing/2008/diagram" xmlns:p="http://schemas.openxmlformats.org/presentationml/2006/main">
   <p:cSld>
     <p:spTree>
       <p:nvGrpSpPr>
@@ -15235,6 +15918,69 @@
               <a:defRPr/>
             </a:pPr>
             <a:endParaRPr lang="ko-KR" altLang="en-US"/>
+          </a:p>
+        </p:txBody>
+      </p:sp>
+      <p:sp>
+        <p:nvSpPr>
+          <p:cNvPr id="13" name="가로 글상자 12"/>
+          <p:cNvSpPr txBox="1"/>
+          <p:nvPr/>
+        </p:nvSpPr>
+        <p:spPr>
+          <a:xfrm>
+            <a:off x="9162218" y="6168936"/>
+            <a:ext cx="2902783" cy="220747"/>
+          </a:xfrm>
+          <a:prstGeom prst="rect">
+            <a:avLst/>
+          </a:prstGeom>
+        </p:spPr>
+        <p:txBody>
+          <a:bodyPr wrap="square">
+            <a:spAutoFit/>
+          </a:bodyPr>
+          <a:p>
+            <a:pPr lvl="0" algn="r">
+              <a:defRPr/>
+            </a:pPr>
+            <a:r>
+              <a:rPr lang="en-US" altLang="ko-KR" sz="900">
+                <a:solidFill>
+                  <a:srgbClr val="f2f2f2"/>
+                </a:solidFill>
+              </a:rPr>
+              <a:t>*</a:t>
+            </a:r>
+            <a:r>
+              <a:rPr lang="ko-KR" altLang="en-US" sz="900">
+                <a:solidFill>
+                  <a:srgbClr val="f2f2f2"/>
+                </a:solidFill>
+              </a:rPr>
+              <a:t>이미지 출처</a:t>
+            </a:r>
+            <a:r>
+              <a:rPr lang="en-US" altLang="ko-KR" sz="900">
+                <a:solidFill>
+                  <a:srgbClr val="f2f2f2"/>
+                </a:solidFill>
+              </a:rPr>
+              <a:t>:</a:t>
+            </a:r>
+            <a:r>
+              <a:rPr lang="ko-KR" altLang="en-US" sz="900">
+                <a:solidFill>
+                  <a:srgbClr val="f2f2f2"/>
+                </a:solidFill>
+              </a:rPr>
+              <a:t> 미리캔버스</a:t>
+            </a:r>
+            <a:endParaRPr lang="ko-KR" altLang="en-US" sz="900">
+              <a:solidFill>
+                <a:srgbClr val="f2f2f2"/>
+              </a:solidFill>
+            </a:endParaRPr>
           </a:p>
         </p:txBody>
       </p:sp>
@@ -15669,7 +16415,7 @@
 </file>
 
 <file path=ppt/slides/slide6.xml><?xml version="1.0" encoding="utf-8"?>
-<p:sld xmlns:a="http://schemas.openxmlformats.org/drawingml/2006/main" xmlns:r="http://schemas.openxmlformats.org/officeDocument/2006/relationships" xmlns:p="http://schemas.openxmlformats.org/presentationml/2006/main">
+<p:sld xmlns:r="http://schemas.openxmlformats.org/officeDocument/2006/relationships" xmlns:c="http://schemas.openxmlformats.org/drawingml/2006/chart" xmlns:a="http://schemas.openxmlformats.org/drawingml/2006/main" xmlns:dgm="http://schemas.openxmlformats.org/drawingml/2006/diagram" xmlns:dsp="http://schemas.microsoft.com/office/drawing/2008/diagram" xmlns:p="http://schemas.openxmlformats.org/presentationml/2006/main">
   <p:cSld>
     <p:spTree>
       <p:nvGrpSpPr>
@@ -16083,6 +16829,69 @@
           </a:p>
         </p:txBody>
       </p:sp>
+      <p:sp>
+        <p:nvSpPr>
+          <p:cNvPr id="13" name="가로 글상자 12"/>
+          <p:cNvSpPr txBox="1"/>
+          <p:nvPr/>
+        </p:nvSpPr>
+        <p:spPr>
+          <a:xfrm>
+            <a:off x="9162218" y="6168936"/>
+            <a:ext cx="2902783" cy="220747"/>
+          </a:xfrm>
+          <a:prstGeom prst="rect">
+            <a:avLst/>
+          </a:prstGeom>
+        </p:spPr>
+        <p:txBody>
+          <a:bodyPr wrap="square">
+            <a:spAutoFit/>
+          </a:bodyPr>
+          <a:p>
+            <a:pPr lvl="0" algn="r">
+              <a:defRPr/>
+            </a:pPr>
+            <a:r>
+              <a:rPr lang="en-US" altLang="ko-KR" sz="900">
+                <a:solidFill>
+                  <a:srgbClr val="f2f2f2"/>
+                </a:solidFill>
+              </a:rPr>
+              <a:t>*</a:t>
+            </a:r>
+            <a:r>
+              <a:rPr lang="ko-KR" altLang="en-US" sz="900">
+                <a:solidFill>
+                  <a:srgbClr val="f2f2f2"/>
+                </a:solidFill>
+              </a:rPr>
+              <a:t>이미지 출처</a:t>
+            </a:r>
+            <a:r>
+              <a:rPr lang="en-US" altLang="ko-KR" sz="900">
+                <a:solidFill>
+                  <a:srgbClr val="f2f2f2"/>
+                </a:solidFill>
+              </a:rPr>
+              <a:t>:</a:t>
+            </a:r>
+            <a:r>
+              <a:rPr lang="ko-KR" altLang="en-US" sz="900">
+                <a:solidFill>
+                  <a:srgbClr val="f2f2f2"/>
+                </a:solidFill>
+              </a:rPr>
+              <a:t> 미리캔버스</a:t>
+            </a:r>
+            <a:endParaRPr lang="ko-KR" altLang="en-US" sz="900">
+              <a:solidFill>
+                <a:srgbClr val="f2f2f2"/>
+              </a:solidFill>
+            </a:endParaRPr>
+          </a:p>
+        </p:txBody>
+      </p:sp>
     </p:spTree>
     <p:extLst>
       <p:ext uri="{BB962C8B-B14F-4D97-AF65-F5344CB8AC3E}">
@@ -16514,7 +17323,7 @@
 </file>
 
 <file path=ppt/slides/slide8.xml><?xml version="1.0" encoding="utf-8"?>
-<p:sld xmlns:a="http://schemas.openxmlformats.org/drawingml/2006/main" xmlns:r="http://schemas.openxmlformats.org/officeDocument/2006/relationships" xmlns:p="http://schemas.openxmlformats.org/presentationml/2006/main">
+<p:sld xmlns:r="http://schemas.openxmlformats.org/officeDocument/2006/relationships" xmlns:c="http://schemas.openxmlformats.org/drawingml/2006/chart" xmlns:a="http://schemas.openxmlformats.org/drawingml/2006/main" xmlns:dgm="http://schemas.openxmlformats.org/drawingml/2006/diagram" xmlns:dsp="http://schemas.microsoft.com/office/drawing/2008/diagram" xmlns:p="http://schemas.openxmlformats.org/presentationml/2006/main">
   <p:cSld>
     <p:spTree>
       <p:nvGrpSpPr>
@@ -16901,6 +17710,69 @@
           </a:prstGeom>
         </p:spPr>
       </p:pic>
+      <p:sp>
+        <p:nvSpPr>
+          <p:cNvPr id="15" name="가로 글상자 14"/>
+          <p:cNvSpPr txBox="1"/>
+          <p:nvPr/>
+        </p:nvSpPr>
+        <p:spPr>
+          <a:xfrm>
+            <a:off x="9162218" y="6168936"/>
+            <a:ext cx="2902783" cy="220747"/>
+          </a:xfrm>
+          <a:prstGeom prst="rect">
+            <a:avLst/>
+          </a:prstGeom>
+        </p:spPr>
+        <p:txBody>
+          <a:bodyPr wrap="square">
+            <a:spAutoFit/>
+          </a:bodyPr>
+          <a:p>
+            <a:pPr lvl="0" algn="r">
+              <a:defRPr/>
+            </a:pPr>
+            <a:r>
+              <a:rPr lang="en-US" altLang="ko-KR" sz="900">
+                <a:solidFill>
+                  <a:srgbClr val="f2f2f2"/>
+                </a:solidFill>
+              </a:rPr>
+              <a:t>*</a:t>
+            </a:r>
+            <a:r>
+              <a:rPr lang="ko-KR" altLang="en-US" sz="900">
+                <a:solidFill>
+                  <a:srgbClr val="f2f2f2"/>
+                </a:solidFill>
+              </a:rPr>
+              <a:t>이미지 출처</a:t>
+            </a:r>
+            <a:r>
+              <a:rPr lang="en-US" altLang="ko-KR" sz="900">
+                <a:solidFill>
+                  <a:srgbClr val="f2f2f2"/>
+                </a:solidFill>
+              </a:rPr>
+              <a:t>:</a:t>
+            </a:r>
+            <a:r>
+              <a:rPr lang="ko-KR" altLang="en-US" sz="900">
+                <a:solidFill>
+                  <a:srgbClr val="f2f2f2"/>
+                </a:solidFill>
+              </a:rPr>
+              <a:t> 미리캔버스</a:t>
+            </a:r>
+            <a:endParaRPr lang="ko-KR" altLang="en-US" sz="900">
+              <a:solidFill>
+                <a:srgbClr val="f2f2f2"/>
+              </a:solidFill>
+            </a:endParaRPr>
+          </a:p>
+        </p:txBody>
+      </p:sp>
     </p:spTree>
     <p:extLst>
       <p:ext uri="{BB962C8B-B14F-4D97-AF65-F5344CB8AC3E}">

--- a/2차시_PPT.pptx
+++ b/2차시_PPT.pptx
@@ -7398,7 +7398,17 @@
               </a:rPr>
               <a:t>)</a:t>
             </a:r>
-            <a:endParaRPr lang="en-US" altLang="ko-KR" sz="2500">
+            <a:r>
+              <a:rPr lang="ko-KR" altLang="en-US" sz="1600">
+                <a:solidFill>
+                  <a:schemeClr val="tx1"/>
+                </a:solidFill>
+                <a:latin typeface="나눔고딕"/>
+                <a:ea typeface="나눔고딕"/>
+              </a:rPr>
+              <a:t> 비밀번호 2026</a:t>
+            </a:r>
+            <a:endParaRPr lang="ko-KR" altLang="en-US" sz="1600">
               <a:solidFill>
                 <a:schemeClr val="tx1"/>
               </a:solidFill>
